--- a/assets/figures-editable/c1-c2/c2-e08.pptx
+++ b/assets/figures-editable/c1-c2/c2-e08.pptx
@@ -7,7 +7,7 @@
   <p:sldIdLst>
     <p:sldId id="256" r:id="rId7"/>
   </p:sldIdLst>
-  <p:sldSz cx="11948160" cy="7924799" type="screen4x3"/>
+  <p:sldSz cx="12191695" cy="6858000" type="screen4x3"/>
   <p:notesSz cx="6858000" cy="9144000"/>
   <p:defaultTextStyle>
     <a:defPPr>
@@ -3098,14 +3098,14 @@
       <p:grpSpPr/>
       <p:sp>
         <p:nvSpPr>
-          <p:cNvPr id="2" name="text1" descr="sci-ppt:C2-E08-001"/>
+          <p:cNvPr id="2" name="C2-E08 text 0" descr="sci-ppt:o000"/>
           <p:cNvSpPr txBox="1"/>
           <p:nvPr/>
         </p:nvSpPr>
         <p:spPr>
           <a:xfrm>
-            <a:off x="316992" y="268224"/>
-            <a:ext cx="11277600" cy="359054"/>
+            <a:off x="274320" y="118872"/>
+            <a:ext cx="11612880" cy="340105"/>
           </a:xfrm>
           <a:prstGeom prst="rect">
             <a:avLst/>
@@ -3114,7 +3114,7 @@
           <a:effectLst/>
         </p:spPr>
         <p:txBody>
-          <a:bodyPr wrap="none" lIns="27432" rIns="27432" tIns="18288" bIns="18288" anchor="ctr">
+          <a:bodyPr wrap="none" lIns="18288" rIns="18288" tIns="18288" bIns="18288" anchor="t">
             <a:spAutoFit/>
           </a:bodyPr>
           <a:lstStyle/>
@@ -3125,34 +3125,31 @@
               </a:spcAft>
             </a:pPr>
             <a:r>
-              <a:rPr sz="1823" b="0" i="0">
+              <a:rPr sz="1900" b="1" i="0">
                 <a:solidFill>
                   <a:srgbClr val="8EDBD4"/>
                 </a:solidFill>
                 <a:latin typeface="Arial"/>
               </a:rPr>
-              <a:t>C2-E08 | Physical-variable diagram</a:t>
-            </a:r>
-          </a:p>
-        </p:txBody>
-      </p:sp>
-      <p:sp>
-        <p:nvSpPr>
-          <p:cNvPr id="3" name="rect2" descr="sci-ppt:C2-E08-002"/>
-          <p:cNvSpPr/>
+              <a:t>C2-E08 · Thermal-contact boundary conditions</a:t>
+            </a:r>
+          </a:p>
+        </p:txBody>
+      </p:sp>
+      <p:cxnSp>
+        <p:nvCxnSpPr>
+          <p:cNvPr id="3" name="C2-E08 line 1" descr="sci-ppt:o001"/>
+          <p:cNvCxnSpPr/>
           <p:nvPr/>
-        </p:nvSpPr>
+        </p:nvCxnSpPr>
         <p:spPr>
           <a:xfrm>
-            <a:off x="1219200" y="1524000"/>
-            <a:ext cx="3048000" cy="2438400"/>
+            <a:off x="914400" y="5029200"/>
+            <a:ext cx="6400800" cy="0"/>
           </a:xfrm>
-          <a:prstGeom prst="rect">
+          <a:prstGeom prst="line">
             <a:avLst/>
           </a:prstGeom>
-          <a:solidFill>
-            <a:srgbClr val="F6BC77"/>
-          </a:solidFill>
           <a:ln w="19050">
             <a:solidFill>
               <a:srgbClr val="B4C7D2"/>
@@ -3160,31 +3157,21 @@
           </a:ln>
           <a:effectLst/>
         </p:spPr>
-        <p:txBody>
-          <a:bodyPr rtlCol="0" anchor="ctr"/>
-          <a:lstStyle/>
-          <a:p>
-            <a:pPr algn="ctr"/>
-          </a:p>
-        </p:txBody>
-      </p:sp>
-      <p:sp>
-        <p:nvSpPr>
-          <p:cNvPr id="4" name="rect3" descr="sci-ppt:C2-E08-003"/>
-          <p:cNvSpPr/>
+      </p:cxnSp>
+      <p:cxnSp>
+        <p:nvCxnSpPr>
+          <p:cNvPr id="4" name="C2-E08 line 2" descr="sci-ppt:o002"/>
+          <p:cNvCxnSpPr/>
           <p:nvPr/>
-        </p:nvSpPr>
+        </p:nvCxnSpPr>
         <p:spPr>
           <a:xfrm>
-            <a:off x="4267200" y="1524000"/>
-            <a:ext cx="4876800" cy="2438400"/>
+            <a:off x="914400" y="1371600"/>
+            <a:ext cx="0" cy="3657600"/>
           </a:xfrm>
-          <a:prstGeom prst="rect">
+          <a:prstGeom prst="line">
             <a:avLst/>
           </a:prstGeom>
-          <a:solidFill>
-            <a:srgbClr val="213E4B"/>
-          </a:solidFill>
           <a:ln w="19050">
             <a:solidFill>
               <a:srgbClr val="B4C7D2"/>
@@ -3192,24 +3179,61 @@
           </a:ln>
           <a:effectLst/>
         </p:spPr>
-        <p:txBody>
-          <a:bodyPr rtlCol="0" anchor="ctr"/>
-          <a:lstStyle/>
-          <a:p>
-            <a:pPr algn="ctr"/>
-          </a:p>
-        </p:txBody>
-      </p:sp>
-      <p:sp>
-        <p:nvSpPr>
-          <p:cNvPr id="5" name="text4" descr="sci-ppt:C2-E08-004"/>
+      </p:cxnSp>
+      <p:cxnSp>
+        <p:nvCxnSpPr>
+          <p:cNvPr id="5" name="C2-E08 line 3" descr="sci-ppt:o003"/>
+          <p:cNvCxnSpPr/>
+          <p:nvPr/>
+        </p:nvCxnSpPr>
+        <p:spPr>
+          <a:xfrm>
+            <a:off x="850392" y="5029200"/>
+            <a:ext cx="64008" cy="0"/>
+          </a:xfrm>
+          <a:prstGeom prst="line">
+            <a:avLst/>
+          </a:prstGeom>
+          <a:ln w="12700">
+            <a:solidFill>
+              <a:srgbClr val="B4C7D2"/>
+            </a:solidFill>
+          </a:ln>
+          <a:effectLst/>
+        </p:spPr>
+      </p:cxnSp>
+      <p:cxnSp>
+        <p:nvCxnSpPr>
+          <p:cNvPr id="6" name="C2-E08 line 4" descr="sci-ppt:o004"/>
+          <p:cNvCxnSpPr/>
+          <p:nvPr/>
+        </p:nvCxnSpPr>
+        <p:spPr>
+          <a:xfrm>
+            <a:off x="914400" y="5029200"/>
+            <a:ext cx="6400800" cy="0"/>
+          </a:xfrm>
+          <a:prstGeom prst="line">
+            <a:avLst/>
+          </a:prstGeom>
+          <a:ln w="7620">
+            <a:solidFill>
+              <a:srgbClr val="2E4756"/>
+            </a:solidFill>
+          </a:ln>
+          <a:effectLst/>
+        </p:spPr>
+      </p:cxnSp>
+      <p:sp>
+        <p:nvSpPr>
+          <p:cNvPr id="7" name="C2-E08 text 5" descr="sci-ppt:o005"/>
           <p:cNvSpPr txBox="1"/>
           <p:nvPr/>
         </p:nvSpPr>
         <p:spPr>
           <a:xfrm>
-            <a:off x="1524000" y="1828800"/>
-            <a:ext cx="3657600" cy="396849"/>
+            <a:off x="45720" y="4946904"/>
+            <a:ext cx="777240" cy="208407"/>
           </a:xfrm>
           <a:prstGeom prst="rect">
             <a:avLst/>
@@ -3218,38 +3242,82 @@
           <a:effectLst/>
         </p:spPr>
         <p:txBody>
-          <a:bodyPr wrap="none" lIns="27432" rIns="27432" tIns="18288" bIns="18288" anchor="ctr">
+          <a:bodyPr wrap="none" lIns="18288" rIns="18288" tIns="18288" bIns="18288" anchor="t">
             <a:spAutoFit/>
           </a:bodyPr>
           <a:lstStyle/>
           <a:p>
-            <a:pPr algn="l">
+            <a:pPr algn="r">
               <a:spcAft>
                 <a:spcPts val="0"/>
               </a:spcAft>
             </a:pPr>
             <a:r>
-              <a:rPr sz="2016" b="0" i="0">
+              <a:rPr sz="1050" b="0" i="0">
                 <a:solidFill>
-                  <a:srgbClr val="142632"/>
+                  <a:srgbClr val="B4C7D2"/>
                 </a:solidFill>
                 <a:latin typeface="Arial"/>
               </a:rPr>
-              <a:t>Absorber / side A</a:t>
-            </a:r>
-          </a:p>
-        </p:txBody>
-      </p:sp>
-      <p:sp>
-        <p:nvSpPr>
-          <p:cNvPr id="6" name="text5" descr="sci-ppt:C2-E08-005"/>
+              <a:t>0.0</a:t>
+            </a:r>
+          </a:p>
+        </p:txBody>
+      </p:sp>
+      <p:cxnSp>
+        <p:nvCxnSpPr>
+          <p:cNvPr id="8" name="C2-E08 line 6" descr="sci-ppt:o006"/>
+          <p:cNvCxnSpPr/>
+          <p:nvPr/>
+        </p:nvCxnSpPr>
+        <p:spPr>
+          <a:xfrm>
+            <a:off x="850392" y="3366654"/>
+            <a:ext cx="64008" cy="0"/>
+          </a:xfrm>
+          <a:prstGeom prst="line">
+            <a:avLst/>
+          </a:prstGeom>
+          <a:ln w="12700">
+            <a:solidFill>
+              <a:srgbClr val="B4C7D2"/>
+            </a:solidFill>
+          </a:ln>
+          <a:effectLst/>
+        </p:spPr>
+      </p:cxnSp>
+      <p:cxnSp>
+        <p:nvCxnSpPr>
+          <p:cNvPr id="9" name="C2-E08 line 7" descr="sci-ppt:o007"/>
+          <p:cNvCxnSpPr/>
+          <p:nvPr/>
+        </p:nvCxnSpPr>
+        <p:spPr>
+          <a:xfrm>
+            <a:off x="914400" y="3366654"/>
+            <a:ext cx="6400800" cy="0"/>
+          </a:xfrm>
+          <a:prstGeom prst="line">
+            <a:avLst/>
+          </a:prstGeom>
+          <a:ln w="7620">
+            <a:solidFill>
+              <a:srgbClr val="2E4756"/>
+            </a:solidFill>
+          </a:ln>
+          <a:effectLst/>
+        </p:spPr>
+      </p:cxnSp>
+      <p:sp>
+        <p:nvSpPr>
+          <p:cNvPr id="10" name="C2-E08 text 8" descr="sci-ppt:o008"/>
           <p:cNvSpPr txBox="1"/>
           <p:nvPr/>
         </p:nvSpPr>
         <p:spPr>
           <a:xfrm>
-            <a:off x="5669280" y="1828800"/>
-            <a:ext cx="3657600" cy="396849"/>
+            <a:off x="45720" y="3284358"/>
+            <a:ext cx="777240" cy="208407"/>
           </a:xfrm>
           <a:prstGeom prst="rect">
             <a:avLst/>
@@ -3258,7 +3326,171 @@
           <a:effectLst/>
         </p:spPr>
         <p:txBody>
-          <a:bodyPr wrap="none" lIns="27432" rIns="27432" tIns="18288" bIns="18288" anchor="ctr">
+          <a:bodyPr wrap="none" lIns="18288" rIns="18288" tIns="18288" bIns="18288" anchor="t">
+            <a:spAutoFit/>
+          </a:bodyPr>
+          <a:lstStyle/>
+          <a:p>
+            <a:pPr algn="r">
+              <a:spcAft>
+                <a:spcPts val="0"/>
+              </a:spcAft>
+            </a:pPr>
+            <a:r>
+              <a:rPr sz="1050" b="0" i="0">
+                <a:solidFill>
+                  <a:srgbClr val="B4C7D2"/>
+                </a:solidFill>
+                <a:latin typeface="Arial"/>
+              </a:rPr>
+              <a:t>0.5</a:t>
+            </a:r>
+          </a:p>
+        </p:txBody>
+      </p:sp>
+      <p:cxnSp>
+        <p:nvCxnSpPr>
+          <p:cNvPr id="11" name="C2-E08 line 9" descr="sci-ppt:o009"/>
+          <p:cNvCxnSpPr/>
+          <p:nvPr/>
+        </p:nvCxnSpPr>
+        <p:spPr>
+          <a:xfrm>
+            <a:off x="850392" y="1704109"/>
+            <a:ext cx="64008" cy="0"/>
+          </a:xfrm>
+          <a:prstGeom prst="line">
+            <a:avLst/>
+          </a:prstGeom>
+          <a:ln w="12700">
+            <a:solidFill>
+              <a:srgbClr val="B4C7D2"/>
+            </a:solidFill>
+          </a:ln>
+          <a:effectLst/>
+        </p:spPr>
+      </p:cxnSp>
+      <p:cxnSp>
+        <p:nvCxnSpPr>
+          <p:cNvPr id="12" name="C2-E08 line 10" descr="sci-ppt:o010"/>
+          <p:cNvCxnSpPr/>
+          <p:nvPr/>
+        </p:nvCxnSpPr>
+        <p:spPr>
+          <a:xfrm>
+            <a:off x="914400" y="1704109"/>
+            <a:ext cx="6400800" cy="0"/>
+          </a:xfrm>
+          <a:prstGeom prst="line">
+            <a:avLst/>
+          </a:prstGeom>
+          <a:ln w="7620">
+            <a:solidFill>
+              <a:srgbClr val="2E4756"/>
+            </a:solidFill>
+          </a:ln>
+          <a:effectLst/>
+        </p:spPr>
+      </p:cxnSp>
+      <p:sp>
+        <p:nvSpPr>
+          <p:cNvPr id="13" name="C2-E08 text 11" descr="sci-ppt:o011"/>
+          <p:cNvSpPr txBox="1"/>
+          <p:nvPr/>
+        </p:nvSpPr>
+        <p:spPr>
+          <a:xfrm>
+            <a:off x="45720" y="1621813"/>
+            <a:ext cx="777240" cy="208407"/>
+          </a:xfrm>
+          <a:prstGeom prst="rect">
+            <a:avLst/>
+          </a:prstGeom>
+          <a:noFill/>
+          <a:effectLst/>
+        </p:spPr>
+        <p:txBody>
+          <a:bodyPr wrap="none" lIns="18288" rIns="18288" tIns="18288" bIns="18288" anchor="t">
+            <a:spAutoFit/>
+          </a:bodyPr>
+          <a:lstStyle/>
+          <a:p>
+            <a:pPr algn="r">
+              <a:spcAft>
+                <a:spcPts val="0"/>
+              </a:spcAft>
+            </a:pPr>
+            <a:r>
+              <a:rPr sz="1050" b="0" i="0">
+                <a:solidFill>
+                  <a:srgbClr val="B4C7D2"/>
+                </a:solidFill>
+                <a:latin typeface="Arial"/>
+              </a:rPr>
+              <a:t>1.0</a:t>
+            </a:r>
+          </a:p>
+        </p:txBody>
+      </p:sp>
+      <p:sp>
+        <p:nvSpPr>
+          <p:cNvPr id="14" name="C2-E08 text 12" descr="sci-ppt:o012"/>
+          <p:cNvSpPr txBox="1"/>
+          <p:nvPr/>
+        </p:nvSpPr>
+        <p:spPr>
+          <a:xfrm>
+            <a:off x="914400" y="5312664"/>
+            <a:ext cx="6400800" cy="231648"/>
+          </a:xfrm>
+          <a:prstGeom prst="rect">
+            <a:avLst/>
+          </a:prstGeom>
+          <a:noFill/>
+          <a:effectLst/>
+        </p:spPr>
+        <p:txBody>
+          <a:bodyPr wrap="none" lIns="18288" rIns="18288" tIns="18288" bIns="18288" anchor="t">
+            <a:spAutoFit/>
+          </a:bodyPr>
+          <a:lstStyle/>
+          <a:p>
+            <a:pPr algn="ctr">
+              <a:spcAft>
+                <a:spcPts val="0"/>
+              </a:spcAft>
+            </a:pPr>
+            <a:r>
+              <a:rPr sz="1200" b="0" i="0">
+                <a:solidFill>
+                  <a:srgbClr val="E7F0F3"/>
+                </a:solidFill>
+                <a:latin typeface="Arial"/>
+              </a:rPr>
+              <a:t>position across the contact</a:t>
+            </a:r>
+          </a:p>
+        </p:txBody>
+      </p:sp>
+      <p:sp>
+        <p:nvSpPr>
+          <p:cNvPr id="15" name="C2-E08 text 13" descr="sci-ppt:o013"/>
+          <p:cNvSpPr txBox="1"/>
+          <p:nvPr/>
+        </p:nvSpPr>
+        <p:spPr>
+          <a:xfrm>
+            <a:off x="365760" y="1024128"/>
+            <a:ext cx="6400800" cy="231648"/>
+          </a:xfrm>
+          <a:prstGeom prst="rect">
+            <a:avLst/>
+          </a:prstGeom>
+          <a:noFill/>
+          <a:effectLst/>
+        </p:spPr>
+        <p:txBody>
+          <a:bodyPr wrap="none" lIns="18288" rIns="18288" tIns="18288" bIns="18288" anchor="t">
             <a:spAutoFit/>
           </a:bodyPr>
           <a:lstStyle/>
@@ -3269,34 +3501,1475 @@
               </a:spcAft>
             </a:pPr>
             <a:r>
-              <a:rPr sz="2016" b="0" i="0">
+              <a:rPr sz="1200" b="0" i="0">
                 <a:solidFill>
                   <a:srgbClr val="E7F0F3"/>
                 </a:solidFill>
                 <a:latin typeface="Arial"/>
               </a:rPr>
-              <a:t>PFC / side B</a:t>
-            </a:r>
+              <a:t>temperature (relative)</a:t>
+            </a:r>
+          </a:p>
+        </p:txBody>
+      </p:sp>
+      <p:sp>
+        <p:nvSpPr>
+          <p:cNvPr id="16" name="C2-E08 polygon 14" descr="sci-ppt:o014"/>
+          <p:cNvSpPr/>
+          <p:nvPr/>
+        </p:nvSpPr>
+        <p:spPr>
+          <a:xfrm>
+            <a:off x="914400" y="1537854"/>
+            <a:ext cx="3192378" cy="663352"/>
+          </a:xfrm>
+          <a:custGeom>
+            <a:avLst/>
+            <a:gdLst/>
+            <a:ahLst/>
+            <a:cxnLst/>
+            <a:rect l="l" t="t" r="r" b="b"/>
+            <a:pathLst>
+              <a:path w="3192378" h="663352">
+                <a:moveTo>
+                  <a:pt x="0" y="0"/>
+                </a:moveTo>
+                <a:lnTo>
+                  <a:pt x="16042" y="3333"/>
+                </a:lnTo>
+                <a:lnTo>
+                  <a:pt x="32084" y="6667"/>
+                </a:lnTo>
+                <a:lnTo>
+                  <a:pt x="48126" y="10000"/>
+                </a:lnTo>
+                <a:lnTo>
+                  <a:pt x="64168" y="13334"/>
+                </a:lnTo>
+                <a:lnTo>
+                  <a:pt x="80210" y="16667"/>
+                </a:lnTo>
+                <a:lnTo>
+                  <a:pt x="96252" y="20001"/>
+                </a:lnTo>
+                <a:lnTo>
+                  <a:pt x="112294" y="23334"/>
+                </a:lnTo>
+                <a:lnTo>
+                  <a:pt x="128336" y="26667"/>
+                </a:lnTo>
+                <a:lnTo>
+                  <a:pt x="144378" y="30001"/>
+                </a:lnTo>
+                <a:lnTo>
+                  <a:pt x="160421" y="33334"/>
+                </a:lnTo>
+                <a:lnTo>
+                  <a:pt x="176463" y="36668"/>
+                </a:lnTo>
+                <a:lnTo>
+                  <a:pt x="192505" y="40001"/>
+                </a:lnTo>
+                <a:lnTo>
+                  <a:pt x="208547" y="43335"/>
+                </a:lnTo>
+                <a:lnTo>
+                  <a:pt x="224589" y="46668"/>
+                </a:lnTo>
+                <a:lnTo>
+                  <a:pt x="240631" y="50001"/>
+                </a:lnTo>
+                <a:lnTo>
+                  <a:pt x="256673" y="53335"/>
+                </a:lnTo>
+                <a:lnTo>
+                  <a:pt x="272715" y="56668"/>
+                </a:lnTo>
+                <a:lnTo>
+                  <a:pt x="288757" y="60002"/>
+                </a:lnTo>
+                <a:lnTo>
+                  <a:pt x="304800" y="63335"/>
+                </a:lnTo>
+                <a:lnTo>
+                  <a:pt x="320842" y="66669"/>
+                </a:lnTo>
+                <a:lnTo>
+                  <a:pt x="336884" y="70002"/>
+                </a:lnTo>
+                <a:lnTo>
+                  <a:pt x="352926" y="73335"/>
+                </a:lnTo>
+                <a:lnTo>
+                  <a:pt x="368968" y="76669"/>
+                </a:lnTo>
+                <a:lnTo>
+                  <a:pt x="385010" y="80002"/>
+                </a:lnTo>
+                <a:lnTo>
+                  <a:pt x="401052" y="83336"/>
+                </a:lnTo>
+                <a:lnTo>
+                  <a:pt x="417094" y="86669"/>
+                </a:lnTo>
+                <a:lnTo>
+                  <a:pt x="433136" y="90003"/>
+                </a:lnTo>
+                <a:lnTo>
+                  <a:pt x="449178" y="93336"/>
+                </a:lnTo>
+                <a:lnTo>
+                  <a:pt x="465221" y="96669"/>
+                </a:lnTo>
+                <a:lnTo>
+                  <a:pt x="481263" y="100003"/>
+                </a:lnTo>
+                <a:lnTo>
+                  <a:pt x="497305" y="103336"/>
+                </a:lnTo>
+                <a:lnTo>
+                  <a:pt x="513347" y="106670"/>
+                </a:lnTo>
+                <a:lnTo>
+                  <a:pt x="529389" y="110003"/>
+                </a:lnTo>
+                <a:lnTo>
+                  <a:pt x="545431" y="113336"/>
+                </a:lnTo>
+                <a:lnTo>
+                  <a:pt x="561473" y="116670"/>
+                </a:lnTo>
+                <a:lnTo>
+                  <a:pt x="577515" y="120003"/>
+                </a:lnTo>
+                <a:lnTo>
+                  <a:pt x="593557" y="123337"/>
+                </a:lnTo>
+                <a:lnTo>
+                  <a:pt x="609599" y="126670"/>
+                </a:lnTo>
+                <a:lnTo>
+                  <a:pt x="625642" y="130004"/>
+                </a:lnTo>
+                <a:lnTo>
+                  <a:pt x="641684" y="133337"/>
+                </a:lnTo>
+                <a:lnTo>
+                  <a:pt x="657726" y="136670"/>
+                </a:lnTo>
+                <a:lnTo>
+                  <a:pt x="673768" y="140004"/>
+                </a:lnTo>
+                <a:lnTo>
+                  <a:pt x="689810" y="143337"/>
+                </a:lnTo>
+                <a:lnTo>
+                  <a:pt x="705852" y="146671"/>
+                </a:lnTo>
+                <a:lnTo>
+                  <a:pt x="721894" y="150004"/>
+                </a:lnTo>
+                <a:lnTo>
+                  <a:pt x="737936" y="153338"/>
+                </a:lnTo>
+                <a:lnTo>
+                  <a:pt x="753978" y="156671"/>
+                </a:lnTo>
+                <a:lnTo>
+                  <a:pt x="770021" y="160004"/>
+                </a:lnTo>
+                <a:lnTo>
+                  <a:pt x="786063" y="163338"/>
+                </a:lnTo>
+                <a:lnTo>
+                  <a:pt x="802105" y="166671"/>
+                </a:lnTo>
+                <a:lnTo>
+                  <a:pt x="818147" y="170005"/>
+                </a:lnTo>
+                <a:lnTo>
+                  <a:pt x="834189" y="173338"/>
+                </a:lnTo>
+                <a:lnTo>
+                  <a:pt x="850231" y="176672"/>
+                </a:lnTo>
+                <a:lnTo>
+                  <a:pt x="866273" y="180005"/>
+                </a:lnTo>
+                <a:lnTo>
+                  <a:pt x="882315" y="183338"/>
+                </a:lnTo>
+                <a:lnTo>
+                  <a:pt x="898357" y="186672"/>
+                </a:lnTo>
+                <a:lnTo>
+                  <a:pt x="914400" y="190005"/>
+                </a:lnTo>
+                <a:lnTo>
+                  <a:pt x="930442" y="193339"/>
+                </a:lnTo>
+                <a:lnTo>
+                  <a:pt x="946484" y="196672"/>
+                </a:lnTo>
+                <a:lnTo>
+                  <a:pt x="962526" y="200006"/>
+                </a:lnTo>
+                <a:lnTo>
+                  <a:pt x="978568" y="203339"/>
+                </a:lnTo>
+                <a:lnTo>
+                  <a:pt x="994610" y="206672"/>
+                </a:lnTo>
+                <a:lnTo>
+                  <a:pt x="1010652" y="210006"/>
+                </a:lnTo>
+                <a:lnTo>
+                  <a:pt x="1026694" y="213339"/>
+                </a:lnTo>
+                <a:lnTo>
+                  <a:pt x="1042736" y="216673"/>
+                </a:lnTo>
+                <a:lnTo>
+                  <a:pt x="1058778" y="220006"/>
+                </a:lnTo>
+                <a:lnTo>
+                  <a:pt x="1074821" y="223339"/>
+                </a:lnTo>
+                <a:lnTo>
+                  <a:pt x="1090863" y="226673"/>
+                </a:lnTo>
+                <a:lnTo>
+                  <a:pt x="1106905" y="230006"/>
+                </a:lnTo>
+                <a:lnTo>
+                  <a:pt x="1122947" y="233340"/>
+                </a:lnTo>
+                <a:lnTo>
+                  <a:pt x="1138989" y="236673"/>
+                </a:lnTo>
+                <a:lnTo>
+                  <a:pt x="1155031" y="240007"/>
+                </a:lnTo>
+                <a:lnTo>
+                  <a:pt x="1171073" y="243340"/>
+                </a:lnTo>
+                <a:lnTo>
+                  <a:pt x="1187115" y="246673"/>
+                </a:lnTo>
+                <a:lnTo>
+                  <a:pt x="1203157" y="250007"/>
+                </a:lnTo>
+                <a:lnTo>
+                  <a:pt x="1219199" y="253340"/>
+                </a:lnTo>
+                <a:lnTo>
+                  <a:pt x="1235242" y="256674"/>
+                </a:lnTo>
+                <a:lnTo>
+                  <a:pt x="1251284" y="260007"/>
+                </a:lnTo>
+                <a:lnTo>
+                  <a:pt x="1267326" y="263341"/>
+                </a:lnTo>
+                <a:lnTo>
+                  <a:pt x="1283368" y="266674"/>
+                </a:lnTo>
+                <a:lnTo>
+                  <a:pt x="1299410" y="270007"/>
+                </a:lnTo>
+                <a:lnTo>
+                  <a:pt x="1315452" y="273341"/>
+                </a:lnTo>
+                <a:lnTo>
+                  <a:pt x="1331494" y="276674"/>
+                </a:lnTo>
+                <a:lnTo>
+                  <a:pt x="1347536" y="280008"/>
+                </a:lnTo>
+                <a:lnTo>
+                  <a:pt x="1363578" y="283341"/>
+                </a:lnTo>
+                <a:lnTo>
+                  <a:pt x="1379621" y="286675"/>
+                </a:lnTo>
+                <a:lnTo>
+                  <a:pt x="1395663" y="290008"/>
+                </a:lnTo>
+                <a:lnTo>
+                  <a:pt x="1411705" y="293341"/>
+                </a:lnTo>
+                <a:lnTo>
+                  <a:pt x="1427747" y="296675"/>
+                </a:lnTo>
+                <a:lnTo>
+                  <a:pt x="1443789" y="300008"/>
+                </a:lnTo>
+                <a:lnTo>
+                  <a:pt x="1459831" y="303342"/>
+                </a:lnTo>
+                <a:lnTo>
+                  <a:pt x="1475873" y="306675"/>
+                </a:lnTo>
+                <a:lnTo>
+                  <a:pt x="1491915" y="310009"/>
+                </a:lnTo>
+                <a:lnTo>
+                  <a:pt x="1507957" y="313342"/>
+                </a:lnTo>
+                <a:lnTo>
+                  <a:pt x="1524000" y="316675"/>
+                </a:lnTo>
+                <a:lnTo>
+                  <a:pt x="1540042" y="320009"/>
+                </a:lnTo>
+                <a:lnTo>
+                  <a:pt x="1556084" y="323342"/>
+                </a:lnTo>
+                <a:lnTo>
+                  <a:pt x="1572126" y="326676"/>
+                </a:lnTo>
+                <a:lnTo>
+                  <a:pt x="1588168" y="330009"/>
+                </a:lnTo>
+                <a:lnTo>
+                  <a:pt x="1604210" y="333342"/>
+                </a:lnTo>
+                <a:lnTo>
+                  <a:pt x="1620252" y="336676"/>
+                </a:lnTo>
+                <a:lnTo>
+                  <a:pt x="1636294" y="340009"/>
+                </a:lnTo>
+                <a:lnTo>
+                  <a:pt x="1652336" y="343343"/>
+                </a:lnTo>
+                <a:lnTo>
+                  <a:pt x="1668378" y="346676"/>
+                </a:lnTo>
+                <a:lnTo>
+                  <a:pt x="1684421" y="350010"/>
+                </a:lnTo>
+                <a:lnTo>
+                  <a:pt x="1700463" y="353343"/>
+                </a:lnTo>
+                <a:lnTo>
+                  <a:pt x="1716505" y="356676"/>
+                </a:lnTo>
+                <a:lnTo>
+                  <a:pt x="1732547" y="360010"/>
+                </a:lnTo>
+                <a:lnTo>
+                  <a:pt x="1748589" y="363343"/>
+                </a:lnTo>
+                <a:lnTo>
+                  <a:pt x="1764631" y="366677"/>
+                </a:lnTo>
+                <a:lnTo>
+                  <a:pt x="1780673" y="370010"/>
+                </a:lnTo>
+                <a:lnTo>
+                  <a:pt x="1796715" y="373344"/>
+                </a:lnTo>
+                <a:lnTo>
+                  <a:pt x="1812757" y="376677"/>
+                </a:lnTo>
+                <a:lnTo>
+                  <a:pt x="1828800" y="380010"/>
+                </a:lnTo>
+                <a:lnTo>
+                  <a:pt x="1844842" y="383344"/>
+                </a:lnTo>
+                <a:lnTo>
+                  <a:pt x="1860884" y="386677"/>
+                </a:lnTo>
+                <a:lnTo>
+                  <a:pt x="1876926" y="390011"/>
+                </a:lnTo>
+                <a:lnTo>
+                  <a:pt x="1892968" y="393344"/>
+                </a:lnTo>
+                <a:lnTo>
+                  <a:pt x="1909010" y="396678"/>
+                </a:lnTo>
+                <a:lnTo>
+                  <a:pt x="1925052" y="400011"/>
+                </a:lnTo>
+                <a:lnTo>
+                  <a:pt x="1941094" y="403344"/>
+                </a:lnTo>
+                <a:lnTo>
+                  <a:pt x="1957136" y="406678"/>
+                </a:lnTo>
+                <a:lnTo>
+                  <a:pt x="1973178" y="410011"/>
+                </a:lnTo>
+                <a:lnTo>
+                  <a:pt x="1989221" y="413345"/>
+                </a:lnTo>
+                <a:lnTo>
+                  <a:pt x="2005263" y="416678"/>
+                </a:lnTo>
+                <a:lnTo>
+                  <a:pt x="2021305" y="420012"/>
+                </a:lnTo>
+                <a:lnTo>
+                  <a:pt x="2037347" y="423345"/>
+                </a:lnTo>
+                <a:lnTo>
+                  <a:pt x="2053389" y="426678"/>
+                </a:lnTo>
+                <a:lnTo>
+                  <a:pt x="2069431" y="430012"/>
+                </a:lnTo>
+                <a:lnTo>
+                  <a:pt x="2085473" y="433345"/>
+                </a:lnTo>
+                <a:lnTo>
+                  <a:pt x="2101515" y="436679"/>
+                </a:lnTo>
+                <a:lnTo>
+                  <a:pt x="2117557" y="440012"/>
+                </a:lnTo>
+                <a:lnTo>
+                  <a:pt x="2133599" y="443346"/>
+                </a:lnTo>
+                <a:lnTo>
+                  <a:pt x="2149642" y="446679"/>
+                </a:lnTo>
+                <a:lnTo>
+                  <a:pt x="2165684" y="450012"/>
+                </a:lnTo>
+                <a:lnTo>
+                  <a:pt x="2181726" y="453346"/>
+                </a:lnTo>
+                <a:lnTo>
+                  <a:pt x="2197768" y="456679"/>
+                </a:lnTo>
+                <a:lnTo>
+                  <a:pt x="2213810" y="460013"/>
+                </a:lnTo>
+                <a:lnTo>
+                  <a:pt x="2229852" y="463346"/>
+                </a:lnTo>
+                <a:lnTo>
+                  <a:pt x="2245894" y="466679"/>
+                </a:lnTo>
+                <a:lnTo>
+                  <a:pt x="2261936" y="470013"/>
+                </a:lnTo>
+                <a:lnTo>
+                  <a:pt x="2277978" y="473346"/>
+                </a:lnTo>
+                <a:lnTo>
+                  <a:pt x="2294021" y="476680"/>
+                </a:lnTo>
+                <a:lnTo>
+                  <a:pt x="2310063" y="480013"/>
+                </a:lnTo>
+                <a:lnTo>
+                  <a:pt x="2326105" y="483347"/>
+                </a:lnTo>
+                <a:lnTo>
+                  <a:pt x="2342147" y="486680"/>
+                </a:lnTo>
+                <a:lnTo>
+                  <a:pt x="2358189" y="490013"/>
+                </a:lnTo>
+                <a:lnTo>
+                  <a:pt x="2374231" y="493347"/>
+                </a:lnTo>
+                <a:lnTo>
+                  <a:pt x="2390273" y="496680"/>
+                </a:lnTo>
+                <a:lnTo>
+                  <a:pt x="2406315" y="500014"/>
+                </a:lnTo>
+                <a:lnTo>
+                  <a:pt x="2422357" y="503347"/>
+                </a:lnTo>
+                <a:lnTo>
+                  <a:pt x="2438400" y="506681"/>
+                </a:lnTo>
+                <a:lnTo>
+                  <a:pt x="2454442" y="510014"/>
+                </a:lnTo>
+                <a:lnTo>
+                  <a:pt x="2470484" y="513347"/>
+                </a:lnTo>
+                <a:lnTo>
+                  <a:pt x="2486526" y="516681"/>
+                </a:lnTo>
+                <a:lnTo>
+                  <a:pt x="2502568" y="520014"/>
+                </a:lnTo>
+                <a:lnTo>
+                  <a:pt x="2518610" y="523348"/>
+                </a:lnTo>
+                <a:lnTo>
+                  <a:pt x="2534652" y="526681"/>
+                </a:lnTo>
+                <a:lnTo>
+                  <a:pt x="2550694" y="530015"/>
+                </a:lnTo>
+                <a:lnTo>
+                  <a:pt x="2566736" y="533348"/>
+                </a:lnTo>
+                <a:lnTo>
+                  <a:pt x="2582778" y="536681"/>
+                </a:lnTo>
+                <a:lnTo>
+                  <a:pt x="2598821" y="540015"/>
+                </a:lnTo>
+                <a:lnTo>
+                  <a:pt x="2614863" y="543348"/>
+                </a:lnTo>
+                <a:lnTo>
+                  <a:pt x="2630905" y="546682"/>
+                </a:lnTo>
+                <a:lnTo>
+                  <a:pt x="2646947" y="550015"/>
+                </a:lnTo>
+                <a:lnTo>
+                  <a:pt x="2662989" y="553349"/>
+                </a:lnTo>
+                <a:lnTo>
+                  <a:pt x="2679031" y="556682"/>
+                </a:lnTo>
+                <a:lnTo>
+                  <a:pt x="2695073" y="560015"/>
+                </a:lnTo>
+                <a:lnTo>
+                  <a:pt x="2711115" y="563349"/>
+                </a:lnTo>
+                <a:lnTo>
+                  <a:pt x="2727157" y="566682"/>
+                </a:lnTo>
+                <a:lnTo>
+                  <a:pt x="2743200" y="570016"/>
+                </a:lnTo>
+                <a:lnTo>
+                  <a:pt x="2759242" y="573349"/>
+                </a:lnTo>
+                <a:lnTo>
+                  <a:pt x="2775284" y="576682"/>
+                </a:lnTo>
+                <a:lnTo>
+                  <a:pt x="2791326" y="580016"/>
+                </a:lnTo>
+                <a:lnTo>
+                  <a:pt x="2807368" y="583349"/>
+                </a:lnTo>
+                <a:lnTo>
+                  <a:pt x="2823410" y="586683"/>
+                </a:lnTo>
+                <a:lnTo>
+                  <a:pt x="2839452" y="590016"/>
+                </a:lnTo>
+                <a:lnTo>
+                  <a:pt x="2855494" y="593350"/>
+                </a:lnTo>
+                <a:lnTo>
+                  <a:pt x="2871536" y="596683"/>
+                </a:lnTo>
+                <a:lnTo>
+                  <a:pt x="2887578" y="600016"/>
+                </a:lnTo>
+                <a:lnTo>
+                  <a:pt x="2903621" y="603350"/>
+                </a:lnTo>
+                <a:lnTo>
+                  <a:pt x="2919663" y="606683"/>
+                </a:lnTo>
+                <a:lnTo>
+                  <a:pt x="2935705" y="610017"/>
+                </a:lnTo>
+                <a:lnTo>
+                  <a:pt x="2951747" y="613350"/>
+                </a:lnTo>
+                <a:lnTo>
+                  <a:pt x="2967789" y="616684"/>
+                </a:lnTo>
+                <a:lnTo>
+                  <a:pt x="2983831" y="620017"/>
+                </a:lnTo>
+                <a:lnTo>
+                  <a:pt x="2999873" y="623350"/>
+                </a:lnTo>
+                <a:lnTo>
+                  <a:pt x="3015915" y="626684"/>
+                </a:lnTo>
+                <a:lnTo>
+                  <a:pt x="3031957" y="630017"/>
+                </a:lnTo>
+                <a:lnTo>
+                  <a:pt x="3047999" y="633351"/>
+                </a:lnTo>
+                <a:lnTo>
+                  <a:pt x="3064042" y="636684"/>
+                </a:lnTo>
+                <a:lnTo>
+                  <a:pt x="3080084" y="640018"/>
+                </a:lnTo>
+                <a:lnTo>
+                  <a:pt x="3096126" y="643351"/>
+                </a:lnTo>
+                <a:lnTo>
+                  <a:pt x="3112168" y="646684"/>
+                </a:lnTo>
+                <a:lnTo>
+                  <a:pt x="3128210" y="650018"/>
+                </a:lnTo>
+                <a:lnTo>
+                  <a:pt x="3144252" y="653351"/>
+                </a:lnTo>
+                <a:lnTo>
+                  <a:pt x="3160294" y="656685"/>
+                </a:lnTo>
+                <a:lnTo>
+                  <a:pt x="3176336" y="660018"/>
+                </a:lnTo>
+                <a:lnTo>
+                  <a:pt x="3192378" y="663352"/>
+                </a:lnTo>
+              </a:path>
+            </a:pathLst>
+          </a:custGeom>
+          <a:noFill/>
+          <a:ln w="38100">
+            <a:solidFill>
+              <a:srgbClr val="F2B880"/>
+            </a:solidFill>
+          </a:ln>
+          <a:effectLst/>
+        </p:spPr>
+        <p:txBody>
+          <a:bodyPr rtlCol="0" anchor="ctr"/>
+          <a:lstStyle/>
+          <a:p>
+            <a:pPr algn="ctr"/>
+          </a:p>
+        </p:txBody>
+      </p:sp>
+      <p:sp>
+        <p:nvSpPr>
+          <p:cNvPr id="17" name="C2-E08 polygon 15" descr="sci-ppt:o015"/>
+          <p:cNvSpPr/>
+          <p:nvPr/>
+        </p:nvSpPr>
+        <p:spPr>
+          <a:xfrm>
+            <a:off x="4122821" y="3368321"/>
+            <a:ext cx="3192379" cy="663351"/>
+          </a:xfrm>
+          <a:custGeom>
+            <a:avLst/>
+            <a:gdLst/>
+            <a:ahLst/>
+            <a:cxnLst/>
+            <a:rect l="l" t="t" r="r" b="b"/>
+            <a:pathLst>
+              <a:path w="3192379" h="663351">
+                <a:moveTo>
+                  <a:pt x="0" y="0"/>
+                </a:moveTo>
+                <a:lnTo>
+                  <a:pt x="16042" y="3333"/>
+                </a:lnTo>
+                <a:lnTo>
+                  <a:pt x="32084" y="6667"/>
+                </a:lnTo>
+                <a:lnTo>
+                  <a:pt x="48126" y="10000"/>
+                </a:lnTo>
+                <a:lnTo>
+                  <a:pt x="64168" y="13333"/>
+                </a:lnTo>
+                <a:lnTo>
+                  <a:pt x="80210" y="16667"/>
+                </a:lnTo>
+                <a:lnTo>
+                  <a:pt x="96252" y="20000"/>
+                </a:lnTo>
+                <a:lnTo>
+                  <a:pt x="112294" y="23334"/>
+                </a:lnTo>
+                <a:lnTo>
+                  <a:pt x="128336" y="26667"/>
+                </a:lnTo>
+                <a:lnTo>
+                  <a:pt x="144378" y="30001"/>
+                </a:lnTo>
+                <a:lnTo>
+                  <a:pt x="160421" y="33334"/>
+                </a:lnTo>
+                <a:lnTo>
+                  <a:pt x="176463" y="36667"/>
+                </a:lnTo>
+                <a:lnTo>
+                  <a:pt x="192505" y="40001"/>
+                </a:lnTo>
+                <a:lnTo>
+                  <a:pt x="208547" y="43334"/>
+                </a:lnTo>
+                <a:lnTo>
+                  <a:pt x="224589" y="46668"/>
+                </a:lnTo>
+                <a:lnTo>
+                  <a:pt x="240631" y="50001"/>
+                </a:lnTo>
+                <a:lnTo>
+                  <a:pt x="256673" y="53335"/>
+                </a:lnTo>
+                <a:lnTo>
+                  <a:pt x="272715" y="56668"/>
+                </a:lnTo>
+                <a:lnTo>
+                  <a:pt x="288757" y="60001"/>
+                </a:lnTo>
+                <a:lnTo>
+                  <a:pt x="304800" y="63335"/>
+                </a:lnTo>
+                <a:lnTo>
+                  <a:pt x="320842" y="66668"/>
+                </a:lnTo>
+                <a:lnTo>
+                  <a:pt x="336884" y="70002"/>
+                </a:lnTo>
+                <a:lnTo>
+                  <a:pt x="352926" y="73335"/>
+                </a:lnTo>
+                <a:lnTo>
+                  <a:pt x="368968" y="76669"/>
+                </a:lnTo>
+                <a:lnTo>
+                  <a:pt x="385010" y="80002"/>
+                </a:lnTo>
+                <a:lnTo>
+                  <a:pt x="401052" y="83335"/>
+                </a:lnTo>
+                <a:lnTo>
+                  <a:pt x="417094" y="86669"/>
+                </a:lnTo>
+                <a:lnTo>
+                  <a:pt x="433136" y="90002"/>
+                </a:lnTo>
+                <a:lnTo>
+                  <a:pt x="449179" y="93336"/>
+                </a:lnTo>
+                <a:lnTo>
+                  <a:pt x="465221" y="96669"/>
+                </a:lnTo>
+                <a:lnTo>
+                  <a:pt x="481263" y="100002"/>
+                </a:lnTo>
+                <a:lnTo>
+                  <a:pt x="497305" y="103336"/>
+                </a:lnTo>
+                <a:lnTo>
+                  <a:pt x="513347" y="106669"/>
+                </a:lnTo>
+                <a:lnTo>
+                  <a:pt x="529389" y="110003"/>
+                </a:lnTo>
+                <a:lnTo>
+                  <a:pt x="545431" y="113336"/>
+                </a:lnTo>
+                <a:lnTo>
+                  <a:pt x="561473" y="116670"/>
+                </a:lnTo>
+                <a:lnTo>
+                  <a:pt x="577515" y="120003"/>
+                </a:lnTo>
+                <a:lnTo>
+                  <a:pt x="593557" y="123336"/>
+                </a:lnTo>
+                <a:lnTo>
+                  <a:pt x="609600" y="126670"/>
+                </a:lnTo>
+                <a:lnTo>
+                  <a:pt x="625642" y="130003"/>
+                </a:lnTo>
+                <a:lnTo>
+                  <a:pt x="641684" y="133337"/>
+                </a:lnTo>
+                <a:lnTo>
+                  <a:pt x="657726" y="136670"/>
+                </a:lnTo>
+                <a:lnTo>
+                  <a:pt x="673768" y="140004"/>
+                </a:lnTo>
+                <a:lnTo>
+                  <a:pt x="689810" y="143337"/>
+                </a:lnTo>
+                <a:lnTo>
+                  <a:pt x="705852" y="146670"/>
+                </a:lnTo>
+                <a:lnTo>
+                  <a:pt x="721894" y="150004"/>
+                </a:lnTo>
+                <a:lnTo>
+                  <a:pt x="737936" y="153337"/>
+                </a:lnTo>
+                <a:lnTo>
+                  <a:pt x="753979" y="156671"/>
+                </a:lnTo>
+                <a:lnTo>
+                  <a:pt x="770021" y="160004"/>
+                </a:lnTo>
+                <a:lnTo>
+                  <a:pt x="786063" y="163338"/>
+                </a:lnTo>
+                <a:lnTo>
+                  <a:pt x="802105" y="166671"/>
+                </a:lnTo>
+                <a:lnTo>
+                  <a:pt x="818147" y="170004"/>
+                </a:lnTo>
+                <a:lnTo>
+                  <a:pt x="834189" y="173338"/>
+                </a:lnTo>
+                <a:lnTo>
+                  <a:pt x="850231" y="176671"/>
+                </a:lnTo>
+                <a:lnTo>
+                  <a:pt x="866273" y="180005"/>
+                </a:lnTo>
+                <a:lnTo>
+                  <a:pt x="882315" y="183338"/>
+                </a:lnTo>
+                <a:lnTo>
+                  <a:pt x="898357" y="186672"/>
+                </a:lnTo>
+                <a:lnTo>
+                  <a:pt x="914400" y="190005"/>
+                </a:lnTo>
+                <a:lnTo>
+                  <a:pt x="930442" y="193338"/>
+                </a:lnTo>
+                <a:lnTo>
+                  <a:pt x="946484" y="196672"/>
+                </a:lnTo>
+                <a:lnTo>
+                  <a:pt x="962526" y="200005"/>
+                </a:lnTo>
+                <a:lnTo>
+                  <a:pt x="978568" y="203339"/>
+                </a:lnTo>
+                <a:lnTo>
+                  <a:pt x="994610" y="206672"/>
+                </a:lnTo>
+                <a:lnTo>
+                  <a:pt x="1010652" y="210005"/>
+                </a:lnTo>
+                <a:lnTo>
+                  <a:pt x="1026694" y="213339"/>
+                </a:lnTo>
+                <a:lnTo>
+                  <a:pt x="1042736" y="216672"/>
+                </a:lnTo>
+                <a:lnTo>
+                  <a:pt x="1058778" y="220006"/>
+                </a:lnTo>
+                <a:lnTo>
+                  <a:pt x="1074821" y="223339"/>
+                </a:lnTo>
+                <a:lnTo>
+                  <a:pt x="1090863" y="226673"/>
+                </a:lnTo>
+                <a:lnTo>
+                  <a:pt x="1106905" y="230006"/>
+                </a:lnTo>
+                <a:lnTo>
+                  <a:pt x="1122947" y="233339"/>
+                </a:lnTo>
+                <a:lnTo>
+                  <a:pt x="1138989" y="236673"/>
+                </a:lnTo>
+                <a:lnTo>
+                  <a:pt x="1155031" y="240006"/>
+                </a:lnTo>
+                <a:lnTo>
+                  <a:pt x="1171073" y="243340"/>
+                </a:lnTo>
+                <a:lnTo>
+                  <a:pt x="1187115" y="246673"/>
+                </a:lnTo>
+                <a:lnTo>
+                  <a:pt x="1203157" y="250007"/>
+                </a:lnTo>
+                <a:lnTo>
+                  <a:pt x="1219200" y="253340"/>
+                </a:lnTo>
+                <a:lnTo>
+                  <a:pt x="1235242" y="256673"/>
+                </a:lnTo>
+                <a:lnTo>
+                  <a:pt x="1251284" y="260007"/>
+                </a:lnTo>
+                <a:lnTo>
+                  <a:pt x="1267326" y="263340"/>
+                </a:lnTo>
+                <a:lnTo>
+                  <a:pt x="1283368" y="266674"/>
+                </a:lnTo>
+                <a:lnTo>
+                  <a:pt x="1299410" y="270007"/>
+                </a:lnTo>
+                <a:lnTo>
+                  <a:pt x="1315452" y="273341"/>
+                </a:lnTo>
+                <a:lnTo>
+                  <a:pt x="1331494" y="276674"/>
+                </a:lnTo>
+                <a:lnTo>
+                  <a:pt x="1347536" y="280007"/>
+                </a:lnTo>
+                <a:lnTo>
+                  <a:pt x="1363578" y="283341"/>
+                </a:lnTo>
+                <a:lnTo>
+                  <a:pt x="1379621" y="286674"/>
+                </a:lnTo>
+                <a:lnTo>
+                  <a:pt x="1395663" y="290008"/>
+                </a:lnTo>
+                <a:lnTo>
+                  <a:pt x="1411705" y="293341"/>
+                </a:lnTo>
+                <a:lnTo>
+                  <a:pt x="1427747" y="296675"/>
+                </a:lnTo>
+                <a:lnTo>
+                  <a:pt x="1443789" y="300008"/>
+                </a:lnTo>
+                <a:lnTo>
+                  <a:pt x="1459831" y="303341"/>
+                </a:lnTo>
+                <a:lnTo>
+                  <a:pt x="1475873" y="306675"/>
+                </a:lnTo>
+                <a:lnTo>
+                  <a:pt x="1491915" y="310008"/>
+                </a:lnTo>
+                <a:lnTo>
+                  <a:pt x="1507957" y="313342"/>
+                </a:lnTo>
+                <a:lnTo>
+                  <a:pt x="1524000" y="316675"/>
+                </a:lnTo>
+                <a:lnTo>
+                  <a:pt x="1540042" y="320009"/>
+                </a:lnTo>
+                <a:lnTo>
+                  <a:pt x="1556084" y="323342"/>
+                </a:lnTo>
+                <a:lnTo>
+                  <a:pt x="1572126" y="326675"/>
+                </a:lnTo>
+                <a:lnTo>
+                  <a:pt x="1588168" y="330009"/>
+                </a:lnTo>
+                <a:lnTo>
+                  <a:pt x="1604210" y="333342"/>
+                </a:lnTo>
+                <a:lnTo>
+                  <a:pt x="1620252" y="336676"/>
+                </a:lnTo>
+                <a:lnTo>
+                  <a:pt x="1636294" y="340009"/>
+                </a:lnTo>
+                <a:lnTo>
+                  <a:pt x="1652336" y="343342"/>
+                </a:lnTo>
+                <a:lnTo>
+                  <a:pt x="1668379" y="346676"/>
+                </a:lnTo>
+                <a:lnTo>
+                  <a:pt x="1684421" y="350009"/>
+                </a:lnTo>
+                <a:lnTo>
+                  <a:pt x="1700463" y="353343"/>
+                </a:lnTo>
+                <a:lnTo>
+                  <a:pt x="1716505" y="356676"/>
+                </a:lnTo>
+                <a:lnTo>
+                  <a:pt x="1732547" y="360010"/>
+                </a:lnTo>
+                <a:lnTo>
+                  <a:pt x="1748589" y="363343"/>
+                </a:lnTo>
+                <a:lnTo>
+                  <a:pt x="1764631" y="366676"/>
+                </a:lnTo>
+                <a:lnTo>
+                  <a:pt x="1780673" y="370010"/>
+                </a:lnTo>
+                <a:lnTo>
+                  <a:pt x="1796715" y="373343"/>
+                </a:lnTo>
+                <a:lnTo>
+                  <a:pt x="1812757" y="376677"/>
+                </a:lnTo>
+                <a:lnTo>
+                  <a:pt x="1828800" y="380010"/>
+                </a:lnTo>
+                <a:lnTo>
+                  <a:pt x="1844842" y="383344"/>
+                </a:lnTo>
+                <a:lnTo>
+                  <a:pt x="1860884" y="386677"/>
+                </a:lnTo>
+                <a:lnTo>
+                  <a:pt x="1876926" y="390010"/>
+                </a:lnTo>
+                <a:lnTo>
+                  <a:pt x="1892968" y="393344"/>
+                </a:lnTo>
+                <a:lnTo>
+                  <a:pt x="1909010" y="396677"/>
+                </a:lnTo>
+                <a:lnTo>
+                  <a:pt x="1925052" y="400011"/>
+                </a:lnTo>
+                <a:lnTo>
+                  <a:pt x="1941094" y="403344"/>
+                </a:lnTo>
+                <a:lnTo>
+                  <a:pt x="1957136" y="406678"/>
+                </a:lnTo>
+                <a:lnTo>
+                  <a:pt x="1973179" y="410011"/>
+                </a:lnTo>
+                <a:lnTo>
+                  <a:pt x="1989221" y="413344"/>
+                </a:lnTo>
+                <a:lnTo>
+                  <a:pt x="2005263" y="416678"/>
+                </a:lnTo>
+                <a:lnTo>
+                  <a:pt x="2021305" y="420011"/>
+                </a:lnTo>
+                <a:lnTo>
+                  <a:pt x="2037347" y="423345"/>
+                </a:lnTo>
+                <a:lnTo>
+                  <a:pt x="2053389" y="426678"/>
+                </a:lnTo>
+                <a:lnTo>
+                  <a:pt x="2069431" y="430012"/>
+                </a:lnTo>
+                <a:lnTo>
+                  <a:pt x="2085473" y="433345"/>
+                </a:lnTo>
+                <a:lnTo>
+                  <a:pt x="2101515" y="436678"/>
+                </a:lnTo>
+                <a:lnTo>
+                  <a:pt x="2117557" y="440012"/>
+                </a:lnTo>
+                <a:lnTo>
+                  <a:pt x="2133600" y="443345"/>
+                </a:lnTo>
+                <a:lnTo>
+                  <a:pt x="2149642" y="446679"/>
+                </a:lnTo>
+                <a:lnTo>
+                  <a:pt x="2165684" y="450012"/>
+                </a:lnTo>
+                <a:lnTo>
+                  <a:pt x="2181726" y="453345"/>
+                </a:lnTo>
+                <a:lnTo>
+                  <a:pt x="2197768" y="456679"/>
+                </a:lnTo>
+                <a:lnTo>
+                  <a:pt x="2213810" y="460012"/>
+                </a:lnTo>
+                <a:lnTo>
+                  <a:pt x="2229852" y="463346"/>
+                </a:lnTo>
+                <a:lnTo>
+                  <a:pt x="2245894" y="466679"/>
+                </a:lnTo>
+                <a:lnTo>
+                  <a:pt x="2261936" y="470013"/>
+                </a:lnTo>
+                <a:lnTo>
+                  <a:pt x="2277979" y="473346"/>
+                </a:lnTo>
+                <a:lnTo>
+                  <a:pt x="2294021" y="476679"/>
+                </a:lnTo>
+                <a:lnTo>
+                  <a:pt x="2310063" y="480013"/>
+                </a:lnTo>
+                <a:lnTo>
+                  <a:pt x="2326105" y="483346"/>
+                </a:lnTo>
+                <a:lnTo>
+                  <a:pt x="2342147" y="486680"/>
+                </a:lnTo>
+                <a:lnTo>
+                  <a:pt x="2358189" y="490013"/>
+                </a:lnTo>
+                <a:lnTo>
+                  <a:pt x="2374231" y="493347"/>
+                </a:lnTo>
+                <a:lnTo>
+                  <a:pt x="2390273" y="496680"/>
+                </a:lnTo>
+                <a:lnTo>
+                  <a:pt x="2406315" y="500013"/>
+                </a:lnTo>
+                <a:lnTo>
+                  <a:pt x="2422357" y="503347"/>
+                </a:lnTo>
+                <a:lnTo>
+                  <a:pt x="2438400" y="506680"/>
+                </a:lnTo>
+                <a:lnTo>
+                  <a:pt x="2454442" y="510014"/>
+                </a:lnTo>
+                <a:lnTo>
+                  <a:pt x="2470484" y="513347"/>
+                </a:lnTo>
+                <a:lnTo>
+                  <a:pt x="2486526" y="516681"/>
+                </a:lnTo>
+                <a:lnTo>
+                  <a:pt x="2502568" y="520014"/>
+                </a:lnTo>
+                <a:lnTo>
+                  <a:pt x="2518610" y="523347"/>
+                </a:lnTo>
+                <a:lnTo>
+                  <a:pt x="2534652" y="526681"/>
+                </a:lnTo>
+                <a:lnTo>
+                  <a:pt x="2550694" y="530014"/>
+                </a:lnTo>
+                <a:lnTo>
+                  <a:pt x="2566736" y="533348"/>
+                </a:lnTo>
+                <a:lnTo>
+                  <a:pt x="2582778" y="536681"/>
+                </a:lnTo>
+                <a:lnTo>
+                  <a:pt x="2598821" y="540015"/>
+                </a:lnTo>
+                <a:lnTo>
+                  <a:pt x="2614863" y="543348"/>
+                </a:lnTo>
+                <a:lnTo>
+                  <a:pt x="2630905" y="546681"/>
+                </a:lnTo>
+                <a:lnTo>
+                  <a:pt x="2646947" y="550015"/>
+                </a:lnTo>
+                <a:lnTo>
+                  <a:pt x="2662989" y="553348"/>
+                </a:lnTo>
+                <a:lnTo>
+                  <a:pt x="2679031" y="556682"/>
+                </a:lnTo>
+                <a:lnTo>
+                  <a:pt x="2695073" y="560015"/>
+                </a:lnTo>
+                <a:lnTo>
+                  <a:pt x="2711115" y="563348"/>
+                </a:lnTo>
+                <a:lnTo>
+                  <a:pt x="2727157" y="566682"/>
+                </a:lnTo>
+                <a:lnTo>
+                  <a:pt x="2743200" y="570015"/>
+                </a:lnTo>
+                <a:lnTo>
+                  <a:pt x="2759242" y="573349"/>
+                </a:lnTo>
+                <a:lnTo>
+                  <a:pt x="2775284" y="576682"/>
+                </a:lnTo>
+                <a:lnTo>
+                  <a:pt x="2791326" y="580016"/>
+                </a:lnTo>
+                <a:lnTo>
+                  <a:pt x="2807368" y="583349"/>
+                </a:lnTo>
+                <a:lnTo>
+                  <a:pt x="2823410" y="586682"/>
+                </a:lnTo>
+                <a:lnTo>
+                  <a:pt x="2839452" y="590016"/>
+                </a:lnTo>
+                <a:lnTo>
+                  <a:pt x="2855494" y="593349"/>
+                </a:lnTo>
+                <a:lnTo>
+                  <a:pt x="2871536" y="596683"/>
+                </a:lnTo>
+                <a:lnTo>
+                  <a:pt x="2887578" y="600016"/>
+                </a:lnTo>
+                <a:lnTo>
+                  <a:pt x="2903621" y="603350"/>
+                </a:lnTo>
+                <a:lnTo>
+                  <a:pt x="2919663" y="606683"/>
+                </a:lnTo>
+                <a:lnTo>
+                  <a:pt x="2935705" y="610016"/>
+                </a:lnTo>
+                <a:lnTo>
+                  <a:pt x="2951747" y="613350"/>
+                </a:lnTo>
+                <a:lnTo>
+                  <a:pt x="2967789" y="616683"/>
+                </a:lnTo>
+                <a:lnTo>
+                  <a:pt x="2983831" y="620017"/>
+                </a:lnTo>
+                <a:lnTo>
+                  <a:pt x="2999873" y="623350"/>
+                </a:lnTo>
+                <a:lnTo>
+                  <a:pt x="3015915" y="626684"/>
+                </a:lnTo>
+                <a:lnTo>
+                  <a:pt x="3031957" y="630017"/>
+                </a:lnTo>
+                <a:lnTo>
+                  <a:pt x="3048000" y="633350"/>
+                </a:lnTo>
+                <a:lnTo>
+                  <a:pt x="3064042" y="636684"/>
+                </a:lnTo>
+                <a:lnTo>
+                  <a:pt x="3080084" y="640017"/>
+                </a:lnTo>
+                <a:lnTo>
+                  <a:pt x="3096126" y="643351"/>
+                </a:lnTo>
+                <a:lnTo>
+                  <a:pt x="3112168" y="646684"/>
+                </a:lnTo>
+                <a:lnTo>
+                  <a:pt x="3128210" y="650018"/>
+                </a:lnTo>
+                <a:lnTo>
+                  <a:pt x="3144252" y="653351"/>
+                </a:lnTo>
+                <a:lnTo>
+                  <a:pt x="3160294" y="656684"/>
+                </a:lnTo>
+                <a:lnTo>
+                  <a:pt x="3176336" y="660018"/>
+                </a:lnTo>
+                <a:lnTo>
+                  <a:pt x="3192379" y="663351"/>
+                </a:lnTo>
+              </a:path>
+            </a:pathLst>
+          </a:custGeom>
+          <a:noFill/>
+          <a:ln w="38100">
+            <a:solidFill>
+              <a:srgbClr val="8EDBD4"/>
+            </a:solidFill>
+          </a:ln>
+          <a:effectLst/>
+        </p:spPr>
+        <p:txBody>
+          <a:bodyPr rtlCol="0" anchor="ctr"/>
+          <a:lstStyle/>
+          <a:p>
+            <a:pPr algn="ctr"/>
           </a:p>
         </p:txBody>
       </p:sp>
       <p:cxnSp>
         <p:nvCxnSpPr>
-          <p:cNvPr id="7" name="arrow6" descr="sci-ppt:C2-E08-006"/>
+          <p:cNvPr id="18" name="C2-E08 line 16" descr="sci-ppt:o016"/>
           <p:cNvCxnSpPr/>
           <p:nvPr/>
         </p:nvCxnSpPr>
         <p:spPr>
           <a:xfrm>
-            <a:off x="3048000" y="2865120"/>
-            <a:ext cx="3291840" cy="0"/>
+            <a:off x="4114800" y="2201206"/>
+            <a:ext cx="0" cy="1167115"/>
           </a:xfrm>
           <a:prstGeom prst="line">
             <a:avLst/>
           </a:prstGeom>
-          <a:ln w="25400">
+          <a:ln w="31750">
             <a:solidFill>
-              <a:srgbClr val="8EDBD4"/>
+              <a:srgbClr val="F28BA0"/>
+            </a:solidFill>
+          </a:ln>
+          <a:effectLst/>
+        </p:spPr>
+      </p:cxnSp>
+      <p:cxnSp>
+        <p:nvCxnSpPr>
+          <p:cNvPr id="19" name="C2-E08 line 17" descr="sci-ppt:o017"/>
+          <p:cNvCxnSpPr/>
+          <p:nvPr/>
+        </p:nvCxnSpPr>
+        <p:spPr>
+          <a:xfrm>
+            <a:off x="4114800" y="1371600"/>
+            <a:ext cx="0" cy="3657600"/>
+          </a:xfrm>
+          <a:prstGeom prst="line">
+            <a:avLst/>
+          </a:prstGeom>
+          <a:ln w="16510">
+            <a:solidFill>
+              <a:srgbClr val="B4C7D2"/>
+            </a:solidFill>
+            <a:prstDash val="dash"/>
+          </a:ln>
+          <a:effectLst/>
+        </p:spPr>
+      </p:cxnSp>
+      <p:sp>
+        <p:nvSpPr>
+          <p:cNvPr id="20" name="C2-E08 text 18" descr="sci-ppt:o018"/>
+          <p:cNvSpPr txBox="1"/>
+          <p:nvPr/>
+        </p:nvSpPr>
+        <p:spPr>
+          <a:xfrm>
+            <a:off x="1307592" y="1492134"/>
+            <a:ext cx="1645920" cy="247142"/>
+          </a:xfrm>
+          <a:prstGeom prst="rect">
+            <a:avLst/>
+          </a:prstGeom>
+          <a:noFill/>
+          <a:effectLst/>
+        </p:spPr>
+        <p:txBody>
+          <a:bodyPr wrap="none" lIns="18288" rIns="18288" tIns="18288" bIns="18288" anchor="t">
+            <a:spAutoFit/>
+          </a:bodyPr>
+          <a:lstStyle/>
+          <a:p>
+            <a:pPr algn="l">
+              <a:spcAft>
+                <a:spcPts val="0"/>
+              </a:spcAft>
+            </a:pPr>
+            <a:r>
+              <a:rPr sz="1300" b="0" i="0">
+                <a:solidFill>
+                  <a:srgbClr val="F2B880"/>
+                </a:solidFill>
+                <a:latin typeface="Arial"/>
+              </a:rPr>
+              <a:t>material A</a:t>
+            </a:r>
+          </a:p>
+        </p:txBody>
+      </p:sp>
+      <p:sp>
+        <p:nvSpPr>
+          <p:cNvPr id="21" name="C2-E08 text 19" descr="sci-ppt:o019"/>
+          <p:cNvSpPr txBox="1"/>
+          <p:nvPr/>
+        </p:nvSpPr>
+        <p:spPr>
+          <a:xfrm>
+            <a:off x="5948172" y="1492134"/>
+            <a:ext cx="1645920" cy="247142"/>
+          </a:xfrm>
+          <a:prstGeom prst="rect">
+            <a:avLst/>
+          </a:prstGeom>
+          <a:noFill/>
+          <a:effectLst/>
+        </p:spPr>
+        <p:txBody>
+          <a:bodyPr wrap="none" lIns="18288" rIns="18288" tIns="18288" bIns="18288" anchor="t">
+            <a:spAutoFit/>
+          </a:bodyPr>
+          <a:lstStyle/>
+          <a:p>
+            <a:pPr algn="l">
+              <a:spcAft>
+                <a:spcPts val="0"/>
+              </a:spcAft>
+            </a:pPr>
+            <a:r>
+              <a:rPr sz="1300" b="0" i="0">
+                <a:solidFill>
+                  <a:srgbClr val="8EDBD4"/>
+                </a:solidFill>
+                <a:latin typeface="Arial"/>
+              </a:rPr>
+              <a:t>material B</a:t>
+            </a:r>
+          </a:p>
+        </p:txBody>
+      </p:sp>
+      <p:sp>
+        <p:nvSpPr>
+          <p:cNvPr id="22" name="C2-E08 text 20" descr="sci-ppt:o020"/>
+          <p:cNvSpPr txBox="1"/>
+          <p:nvPr/>
+        </p:nvSpPr>
+        <p:spPr>
+          <a:xfrm>
+            <a:off x="4384548" y="2535381"/>
+            <a:ext cx="2560320" cy="247142"/>
+          </a:xfrm>
+          <a:prstGeom prst="rect">
+            <a:avLst/>
+          </a:prstGeom>
+          <a:noFill/>
+          <a:effectLst/>
+        </p:spPr>
+        <p:txBody>
+          <a:bodyPr wrap="none" lIns="18288" rIns="18288" tIns="18288" bIns="18288" anchor="t">
+            <a:spAutoFit/>
+          </a:bodyPr>
+          <a:lstStyle/>
+          <a:p>
+            <a:pPr algn="l">
+              <a:spcAft>
+                <a:spcPts val="0"/>
+              </a:spcAft>
+            </a:pPr>
+            <a:r>
+              <a:rPr sz="1300" b="0" i="0">
+                <a:solidFill>
+                  <a:srgbClr val="F28BA0"/>
+                </a:solidFill>
+                <a:latin typeface="Arial"/>
+              </a:rPr>
+              <a:t>T_A − T_B = R_T qₙ</a:t>
+            </a:r>
+          </a:p>
+        </p:txBody>
+      </p:sp>
+      <p:cxnSp>
+        <p:nvCxnSpPr>
+          <p:cNvPr id="23" name="C2-E08 arrow 21" descr="sci-ppt:o021"/>
+          <p:cNvCxnSpPr/>
+          <p:nvPr/>
+        </p:nvCxnSpPr>
+        <p:spPr>
+          <a:xfrm>
+            <a:off x="1554479" y="4630189"/>
+            <a:ext cx="1920241" cy="0"/>
+          </a:xfrm>
+          <a:prstGeom prst="line">
+            <a:avLst/>
+          </a:prstGeom>
+          <a:ln w="38100">
+            <a:solidFill>
+              <a:srgbClr val="F28BA0"/>
             </a:solidFill>
             <a:headEnd type="none" w="med" len="med"/>
             <a:tailEnd type="triangle" w="med" len="med"/>
@@ -3304,16 +4977,40 @@
           <a:effectLst/>
         </p:spPr>
       </p:cxnSp>
-      <p:sp>
-        <p:nvSpPr>
-          <p:cNvPr id="8" name="text7" descr="sci-ppt:C2-E08-007"/>
+      <p:cxnSp>
+        <p:nvCxnSpPr>
+          <p:cNvPr id="24" name="C2-E08 arrow 22" descr="sci-ppt:o022"/>
+          <p:cNvCxnSpPr/>
+          <p:nvPr/>
+        </p:nvCxnSpPr>
+        <p:spPr>
+          <a:xfrm>
+            <a:off x="4754880" y="4630189"/>
+            <a:ext cx="1920240" cy="0"/>
+          </a:xfrm>
+          <a:prstGeom prst="line">
+            <a:avLst/>
+          </a:prstGeom>
+          <a:ln w="38100">
+            <a:solidFill>
+              <a:srgbClr val="F28BA0"/>
+            </a:solidFill>
+            <a:headEnd type="none" w="med" len="med"/>
+            <a:tailEnd type="triangle" w="med" len="med"/>
+          </a:ln>
+          <a:effectLst/>
+        </p:spPr>
+      </p:cxnSp>
+      <p:sp>
+        <p:nvSpPr>
+          <p:cNvPr id="25" name="C2-E08 text 23" descr="sci-ppt:o023"/>
           <p:cNvSpPr txBox="1"/>
           <p:nvPr/>
         </p:nvSpPr>
         <p:spPr>
           <a:xfrm>
-            <a:off x="4632960" y="3169920"/>
-            <a:ext cx="4876800" cy="359054"/>
+            <a:off x="2514600" y="4272741"/>
+            <a:ext cx="731520" cy="247142"/>
           </a:xfrm>
           <a:prstGeom prst="rect">
             <a:avLst/>
@@ -3322,7 +5019,7 @@
           <a:effectLst/>
         </p:spPr>
         <p:txBody>
-          <a:bodyPr wrap="none" lIns="27432" rIns="27432" tIns="18288" bIns="18288" anchor="ctr">
+          <a:bodyPr wrap="none" lIns="18288" rIns="18288" tIns="18288" bIns="18288" anchor="t">
             <a:spAutoFit/>
           </a:bodyPr>
           <a:lstStyle/>
@@ -3333,27 +5030,27 @@
               </a:spcAft>
             </a:pPr>
             <a:r>
-              <a:rPr sz="1823" b="0" i="0">
+              <a:rPr sz="1300" b="0" i="0">
                 <a:solidFill>
-                  <a:srgbClr val="E7F0F3"/>
+                  <a:srgbClr val="F28BA0"/>
                 </a:solidFill>
                 <a:latin typeface="Arial"/>
               </a:rPr>
-              <a:t>q; normal A → B</a:t>
-            </a:r>
-          </a:p>
-        </p:txBody>
-      </p:sp>
-      <p:sp>
-        <p:nvSpPr>
-          <p:cNvPr id="9" name="text8" descr="sci-ppt:C2-E08-008"/>
+              <a:t>qₙ</a:t>
+            </a:r>
+          </a:p>
+        </p:txBody>
+      </p:sp>
+      <p:sp>
+        <p:nvSpPr>
+          <p:cNvPr id="26" name="C2-E08 text 24" descr="sci-ppt:o024"/>
           <p:cNvSpPr txBox="1"/>
           <p:nvPr/>
         </p:nvSpPr>
         <p:spPr>
           <a:xfrm>
-            <a:off x="1219200" y="1097280"/>
-            <a:ext cx="1828800" cy="377952"/>
+            <a:off x="5554980" y="4272741"/>
+            <a:ext cx="1280160" cy="231648"/>
           </a:xfrm>
           <a:prstGeom prst="rect">
             <a:avLst/>
@@ -3362,7 +5059,7 @@
           <a:effectLst/>
         </p:spPr>
         <p:txBody>
-          <a:bodyPr wrap="none" lIns="27432" rIns="27432" tIns="18288" bIns="18288" anchor="ctr">
+          <a:bodyPr wrap="none" lIns="18288" rIns="18288" tIns="18288" bIns="18288" anchor="t">
             <a:spAutoFit/>
           </a:bodyPr>
           <a:lstStyle/>
@@ -3373,27 +5070,59 @@
               </a:spcAft>
             </a:pPr>
             <a:r>
-              <a:rPr sz="1920" b="0" i="0">
+              <a:rPr sz="1200" b="0" i="0">
                 <a:solidFill>
-                  <a:srgbClr val="E7F0F3"/>
+                  <a:srgbClr val="F28BA0"/>
                 </a:solidFill>
                 <a:latin typeface="Arial"/>
               </a:rPr>
-              <a:t>T_A</a:t>
-            </a:r>
-          </a:p>
-        </p:txBody>
-      </p:sp>
-      <p:sp>
-        <p:nvSpPr>
-          <p:cNvPr id="10" name="text9" descr="sci-ppt:C2-E08-009"/>
+              <a:t>qₙ (same)</a:t>
+            </a:r>
+          </a:p>
+        </p:txBody>
+      </p:sp>
+      <p:sp>
+        <p:nvSpPr>
+          <p:cNvPr id="27" name="C2-E08 round_rect 25" descr="sci-ppt:o025"/>
+          <p:cNvSpPr/>
+          <p:nvPr/>
+        </p:nvSpPr>
+        <p:spPr>
+          <a:xfrm>
+            <a:off x="7589520" y="1371600"/>
+            <a:ext cx="4251960" cy="3657600"/>
+          </a:xfrm>
+          <a:prstGeom prst="roundRect">
+            <a:avLst/>
+          </a:prstGeom>
+          <a:solidFill>
+            <a:srgbClr val="213E4B"/>
+          </a:solidFill>
+          <a:ln w="20320">
+            <a:solidFill>
+              <a:srgbClr val="8EDBD4"/>
+            </a:solidFill>
+          </a:ln>
+          <a:effectLst/>
+        </p:spPr>
+        <p:txBody>
+          <a:bodyPr rtlCol="0" anchor="ctr"/>
+          <a:lstStyle/>
+          <a:p>
+            <a:pPr algn="ctr"/>
+          </a:p>
+        </p:txBody>
+      </p:sp>
+      <p:sp>
+        <p:nvSpPr>
+          <p:cNvPr id="28" name="C2-E08 text 26" descr="sci-ppt:o026"/>
           <p:cNvSpPr txBox="1"/>
           <p:nvPr/>
         </p:nvSpPr>
         <p:spPr>
           <a:xfrm>
-            <a:off x="7071360" y="1097280"/>
-            <a:ext cx="1828800" cy="377952"/>
+            <a:off x="7699248" y="1426464"/>
+            <a:ext cx="4032504" cy="254889"/>
           </a:xfrm>
           <a:prstGeom prst="rect">
             <a:avLst/>
@@ -3402,7 +5131,7 @@
           <a:effectLst/>
         </p:spPr>
         <p:txBody>
-          <a:bodyPr wrap="none" lIns="27432" rIns="27432" tIns="18288" bIns="18288" anchor="ctr">
+          <a:bodyPr wrap="none" lIns="18288" rIns="18288" tIns="18288" bIns="18288" anchor="t">
             <a:spAutoFit/>
           </a:bodyPr>
           <a:lstStyle/>
@@ -3413,27 +5142,27 @@
               </a:spcAft>
             </a:pPr>
             <a:r>
-              <a:rPr sz="1920" b="0" i="0">
+              <a:rPr sz="1350" b="1" i="0">
                 <a:solidFill>
-                  <a:srgbClr val="E7F0F3"/>
+                  <a:srgbClr val="8EDBD4"/>
                 </a:solidFill>
                 <a:latin typeface="Arial"/>
               </a:rPr>
-              <a:t>T_B</a:t>
-            </a:r>
-          </a:p>
-        </p:txBody>
-      </p:sp>
-      <p:sp>
-        <p:nvSpPr>
-          <p:cNvPr id="11" name="text10" descr="sci-ppt:C2-E08-010"/>
+              <a:t>Resistance at the contact</a:t>
+            </a:r>
+          </a:p>
+        </p:txBody>
+      </p:sp>
+      <p:sp>
+        <p:nvSpPr>
+          <p:cNvPr id="29" name="C2-E08 text 27" descr="sci-ppt:o027"/>
           <p:cNvSpPr txBox="1"/>
           <p:nvPr/>
         </p:nvSpPr>
         <p:spPr>
           <a:xfrm>
-            <a:off x="1402080" y="4206240"/>
-            <a:ext cx="10363200" cy="340156"/>
+            <a:off x="7726679" y="1828800"/>
+            <a:ext cx="4023360" cy="448563"/>
           </a:xfrm>
           <a:prstGeom prst="rect">
             <a:avLst/>
@@ -3442,7 +5171,7 @@
           <a:effectLst/>
         </p:spPr>
         <p:txBody>
-          <a:bodyPr wrap="none" lIns="27432" rIns="27432" tIns="18288" bIns="18288" anchor="ctr">
+          <a:bodyPr wrap="none" lIns="18288" rIns="18288" tIns="18288" bIns="18288" anchor="t">
             <a:spAutoFit/>
           </a:bodyPr>
           <a:lstStyle/>
@@ -3453,27 +5182,43 @@
               </a:spcAft>
             </a:pPr>
             <a:r>
-              <a:rPr sz="1728" b="0" i="0">
+              <a:rPr sz="1300" b="1" i="0">
                 <a:solidFill>
                   <a:srgbClr val="E7F0F3"/>
                 </a:solidFill>
                 <a:latin typeface="Arial"/>
               </a:rPr>
-              <a:t>Thermal path and contact are distinct from optical deposition.</a:t>
-            </a:r>
-          </a:p>
-        </p:txBody>
-      </p:sp>
-      <p:sp>
-        <p:nvSpPr>
-          <p:cNvPr id="12" name="text11" descr="sci-ppt:C2-E08-011"/>
+              <a:t>Flux continuity:</a:t>
+            </a:r>
+          </a:p>
+          <a:p>
+            <a:pPr algn="l">
+              <a:spcAft>
+                <a:spcPts val="0"/>
+              </a:spcAft>
+            </a:pPr>
+            <a:r>
+              <a:rPr sz="1300" b="1" i="0">
+                <a:solidFill>
+                  <a:srgbClr val="E7F0F3"/>
+                </a:solidFill>
+                <a:latin typeface="Arial"/>
+              </a:rPr>
+              <a:t>q_A·n = q_B·n = qₙ</a:t>
+            </a:r>
+          </a:p>
+        </p:txBody>
+      </p:sp>
+      <p:sp>
+        <p:nvSpPr>
+          <p:cNvPr id="30" name="C2-E08 text 28" descr="sci-ppt:o028"/>
           <p:cNvSpPr txBox="1"/>
           <p:nvPr/>
         </p:nvSpPr>
         <p:spPr>
           <a:xfrm>
-            <a:off x="365760" y="4974336"/>
-            <a:ext cx="5547360" cy="321259"/>
+            <a:off x="7726679" y="2606040"/>
+            <a:ext cx="4023360" cy="448563"/>
           </a:xfrm>
           <a:prstGeom prst="rect">
             <a:avLst/>
@@ -3482,7 +5227,7 @@
           <a:effectLst/>
         </p:spPr>
         <p:txBody>
-          <a:bodyPr wrap="none" lIns="27432" rIns="27432" tIns="18288" bIns="18288" anchor="ctr">
+          <a:bodyPr wrap="none" lIns="18288" rIns="18288" tIns="18288" bIns="18288" anchor="t">
             <a:spAutoFit/>
           </a:bodyPr>
           <a:lstStyle/>
@@ -3493,27 +5238,43 @@
               </a:spcAft>
             </a:pPr>
             <a:r>
-              <a:rPr sz="1632" b="0" i="0">
+              <a:rPr sz="1300" b="1" i="0">
                 <a:solidFill>
-                  <a:srgbClr val="E7F0F3"/>
+                  <a:srgbClr val="F28BA0"/>
                 </a:solidFill>
                 <a:latin typeface="Arial"/>
               </a:rPr>
-              <a:t>A: absorber side, T_A, q_A</a:t>
-            </a:r>
-          </a:p>
-        </p:txBody>
-      </p:sp>
-      <p:sp>
-        <p:nvSpPr>
-          <p:cNvPr id="13" name="text12" descr="sci-ppt:C2-E08-012"/>
+              <a:t>Temperature jump:</a:t>
+            </a:r>
+          </a:p>
+          <a:p>
+            <a:pPr algn="l">
+              <a:spcAft>
+                <a:spcPts val="0"/>
+              </a:spcAft>
+            </a:pPr>
+            <a:r>
+              <a:rPr sz="1300" b="1" i="0">
+                <a:solidFill>
+                  <a:srgbClr val="F28BA0"/>
+                </a:solidFill>
+                <a:latin typeface="Arial"/>
+              </a:rPr>
+              <a:t>T_A − T_B = R_T qₙ</a:t>
+            </a:r>
+          </a:p>
+        </p:txBody>
+      </p:sp>
+      <p:sp>
+        <p:nvSpPr>
+          <p:cNvPr id="31" name="C2-E08 text 29" descr="sci-ppt:o029"/>
           <p:cNvSpPr txBox="1"/>
           <p:nvPr/>
         </p:nvSpPr>
         <p:spPr>
           <a:xfrm>
-            <a:off x="365760" y="5266944"/>
-            <a:ext cx="5547360" cy="321259"/>
+            <a:off x="7726679" y="3383280"/>
+            <a:ext cx="4023360" cy="603504"/>
           </a:xfrm>
           <a:prstGeom prst="rect">
             <a:avLst/>
@@ -3522,7 +5283,7 @@
           <a:effectLst/>
         </p:spPr>
         <p:txBody>
-          <a:bodyPr wrap="none" lIns="27432" rIns="27432" tIns="18288" bIns="18288" anchor="ctr">
+          <a:bodyPr wrap="none" lIns="18288" rIns="18288" tIns="18288" bIns="18288" anchor="t">
             <a:spAutoFit/>
           </a:bodyPr>
           <a:lstStyle/>
@@ -3533,27 +5294,59 @@
               </a:spcAft>
             </a:pPr>
             <a:r>
-              <a:rPr sz="1632" b="0" i="0">
+              <a:rPr sz="1200" b="0" i="0">
                 <a:solidFill>
                   <a:srgbClr val="E7F0F3"/>
                 </a:solidFill>
                 <a:latin typeface="Arial"/>
               </a:rPr>
-              <a:t>n_AB: A → B</a:t>
-            </a:r>
-          </a:p>
-        </p:txBody>
-      </p:sp>
-      <p:sp>
-        <p:nvSpPr>
-          <p:cNvPr id="14" name="text13" descr="sci-ppt:C2-E08-013"/>
+              <a:t>R_T (m²K/W) is a property of the interface. The</a:t>
+            </a:r>
+          </a:p>
+          <a:p>
+            <a:pPr algn="l">
+              <a:spcAft>
+                <a:spcPts val="0"/>
+              </a:spcAft>
+            </a:pPr>
+            <a:r>
+              <a:rPr sz="1200" b="0" i="0">
+                <a:solidFill>
+                  <a:srgbClr val="E7F0F3"/>
+                </a:solidFill>
+                <a:latin typeface="Arial"/>
+              </a:rPr>
+              <a:t>same heat flows, but a temperature step builds up</a:t>
+            </a:r>
+          </a:p>
+          <a:p>
+            <a:pPr algn="l">
+              <a:spcAft>
+                <a:spcPts val="0"/>
+              </a:spcAft>
+            </a:pPr>
+            <a:r>
+              <a:rPr sz="1200" b="0" i="0">
+                <a:solidFill>
+                  <a:srgbClr val="E7F0F3"/>
+                </a:solidFill>
+                <a:latin typeface="Arial"/>
+              </a:rPr>
+              <a:t>and delays heating of side B.</a:t>
+            </a:r>
+          </a:p>
+        </p:txBody>
+      </p:sp>
+      <p:sp>
+        <p:nvSpPr>
+          <p:cNvPr id="32" name="C2-E08 text 30" descr="sci-ppt:o030"/>
           <p:cNvSpPr txBox="1"/>
           <p:nvPr/>
         </p:nvSpPr>
         <p:spPr>
           <a:xfrm>
-            <a:off x="365760" y="5559552"/>
-            <a:ext cx="5547360" cy="321259"/>
+            <a:off x="914400" y="5733288"/>
+            <a:ext cx="10972800" cy="239395"/>
           </a:xfrm>
           <a:prstGeom prst="rect">
             <a:avLst/>
@@ -3562,7 +5355,7 @@
           <a:effectLst/>
         </p:spPr>
         <p:txBody>
-          <a:bodyPr wrap="none" lIns="27432" rIns="27432" tIns="18288" bIns="18288" anchor="ctr">
+          <a:bodyPr wrap="none" lIns="18288" rIns="18288" tIns="18288" bIns="18288" anchor="t">
             <a:spAutoFit/>
           </a:bodyPr>
           <a:lstStyle/>
@@ -3573,27 +5366,27 @@
               </a:spcAft>
             </a:pPr>
             <a:r>
-              <a:rPr sz="1632" b="0" i="0">
+              <a:rPr sz="1250" b="0" i="0">
                 <a:solidFill>
-                  <a:srgbClr val="E7F0F3"/>
+                  <a:srgbClr val="F2B880"/>
                 </a:solidFill>
                 <a:latin typeface="Arial"/>
               </a:rPr>
-              <a:t>ℛ_T: contact resistance</a:t>
-            </a:r>
-          </a:p>
-        </p:txBody>
-      </p:sp>
-      <p:sp>
-        <p:nvSpPr>
-          <p:cNvPr id="15" name="text14" descr="sci-ppt:C2-E08-014"/>
+              <a:t>Light is absorbed in A, yet B warms only after heat crosses the contact: absorbed energy is not delivered energy.</a:t>
+            </a:r>
+          </a:p>
+        </p:txBody>
+      </p:sp>
+      <p:sp>
+        <p:nvSpPr>
+          <p:cNvPr id="33" name="C2-E08 text 31" descr="sci-ppt:o031"/>
           <p:cNvSpPr txBox="1"/>
           <p:nvPr/>
         </p:nvSpPr>
         <p:spPr>
           <a:xfrm>
-            <a:off x="6156960" y="4974336"/>
-            <a:ext cx="5547360" cy="321259"/>
+            <a:off x="320040" y="6510528"/>
+            <a:ext cx="11521440" cy="200660"/>
           </a:xfrm>
           <a:prstGeom prst="rect">
             <a:avLst/>
@@ -3602,7 +5395,7 @@
           <a:effectLst/>
         </p:spPr>
         <p:txBody>
-          <a:bodyPr wrap="none" lIns="27432" rIns="27432" tIns="18288" bIns="18288" anchor="ctr">
+          <a:bodyPr wrap="none" lIns="18288" rIns="18288" tIns="18288" bIns="18288" anchor="t">
             <a:spAutoFit/>
           </a:bodyPr>
           <a:lstStyle/>
@@ -3613,133 +5406,13 @@
               </a:spcAft>
             </a:pPr>
             <a:r>
-              <a:rPr sz="1632" b="0" i="0">
-                <a:solidFill>
-                  <a:srgbClr val="E7F0F3"/>
-                </a:solidFill>
-                <a:latin typeface="Arial"/>
-              </a:rPr>
-              <a:t>B: PFC side, T_B, q_B</a:t>
-            </a:r>
-          </a:p>
-        </p:txBody>
-      </p:sp>
-      <p:sp>
-        <p:nvSpPr>
-          <p:cNvPr id="16" name="text15" descr="sci-ppt:C2-E08-015"/>
-          <p:cNvSpPr txBox="1"/>
-          <p:nvPr/>
-        </p:nvSpPr>
-        <p:spPr>
-          <a:xfrm>
-            <a:off x="6156960" y="5266944"/>
-            <a:ext cx="5547360" cy="321259"/>
-          </a:xfrm>
-          <a:prstGeom prst="rect">
-            <a:avLst/>
-          </a:prstGeom>
-          <a:noFill/>
-          <a:effectLst/>
-        </p:spPr>
-        <p:txBody>
-          <a:bodyPr wrap="none" lIns="27432" rIns="27432" tIns="18288" bIns="18288" anchor="ctr">
-            <a:spAutoFit/>
-          </a:bodyPr>
-          <a:lstStyle/>
-          <a:p>
-            <a:pPr algn="l">
-              <a:spcAft>
-                <a:spcPts val="0"/>
-              </a:spcAft>
-            </a:pPr>
-            <a:r>
-              <a:rPr sz="1632" b="0" i="0">
-                <a:solidFill>
-                  <a:srgbClr val="E7F0F3"/>
-                </a:solidFill>
-                <a:latin typeface="Arial"/>
-              </a:rPr>
-              <a:t>q_n: continuous normal flux</a:t>
-            </a:r>
-          </a:p>
-        </p:txBody>
-      </p:sp>
-      <p:sp>
-        <p:nvSpPr>
-          <p:cNvPr id="17" name="text16" descr="sci-ppt:C2-E08-016"/>
-          <p:cNvSpPr txBox="1"/>
-          <p:nvPr/>
-        </p:nvSpPr>
-        <p:spPr>
-          <a:xfrm>
-            <a:off x="365760" y="6278880"/>
-            <a:ext cx="11277600" cy="302361"/>
-          </a:xfrm>
-          <a:prstGeom prst="rect">
-            <a:avLst/>
-          </a:prstGeom>
-          <a:noFill/>
-          <a:effectLst/>
-        </p:spPr>
-        <p:txBody>
-          <a:bodyPr wrap="none" lIns="27432" rIns="27432" tIns="18288" bIns="18288" anchor="ctr">
-            <a:spAutoFit/>
-          </a:bodyPr>
-          <a:lstStyle/>
-          <a:p>
-            <a:pPr algn="l">
-              <a:spcAft>
-                <a:spcPts val="0"/>
-              </a:spcAft>
-            </a:pPr>
-            <a:r>
-              <a:rPr sz="1536" b="0" i="0">
+              <a:rPr sz="1000" b="0" i="0">
                 <a:solidFill>
                   <a:srgbClr val="B4C7D2"/>
                 </a:solidFill>
                 <a:latin typeface="Arial"/>
               </a:rPr>
-              <a:t>Hot A gives positive q_n when T_A &gt; T_B</a:t>
-            </a:r>
-          </a:p>
-        </p:txBody>
-      </p:sp>
-      <p:sp>
-        <p:nvSpPr>
-          <p:cNvPr id="18" name="text17" descr="sci-ppt:C2-E08-017"/>
-          <p:cNvSpPr txBox="1"/>
-          <p:nvPr/>
-        </p:nvSpPr>
-        <p:spPr>
-          <a:xfrm>
-            <a:off x="365760" y="6571488"/>
-            <a:ext cx="11277600" cy="302361"/>
-          </a:xfrm>
-          <a:prstGeom prst="rect">
-            <a:avLst/>
-          </a:prstGeom>
-          <a:noFill/>
-          <a:effectLst/>
-        </p:spPr>
-        <p:txBody>
-          <a:bodyPr wrap="none" lIns="27432" rIns="27432" tIns="18288" bIns="18288" anchor="ctr">
-            <a:spAutoFit/>
-          </a:bodyPr>
-          <a:lstStyle/>
-          <a:p>
-            <a:pPr algn="l">
-              <a:spcAft>
-                <a:spcPts val="0"/>
-              </a:spcAft>
-            </a:pPr>
-            <a:r>
-              <a:rPr sz="1536" b="0" i="0">
-                <a:solidFill>
-                  <a:srgbClr val="B4C7D2"/>
-                </a:solidFill>
-                <a:latin typeface="Arial"/>
-              </a:rPr>
-              <a:t>No stored heat at the contact in this control</a:t>
+              <a:t>Contact conditions of Eq. C2-E08; profile is schematic.</a:t>
             </a:r>
           </a:p>
         </p:txBody>
